--- a/PPTs/L4.2 Adversarial Attacks for AD.pptx
+++ b/PPTs/L4.2 Adversarial Attacks for AD.pptx
@@ -617,7 +617,7 @@
           <a:lstStyle/>
           <a:p>
             <a:r>
-              <a:t>Supplement to L3.2 (about 75 minutes). L3.2 covered the algorithms (FGSM, PGD, physical attacks, adversarial training). This lecture asks what changes when the victim is an autonomous vehicle: temporal state (tracking), a different sensor (LiDAR), multi-sensor fusion, and the closed loop down to steering and braking. Timing guide: recap 8 min, tracking 12, LiDAR 22, fusion 10, closed loop 15, defenses and discussion 8. Title image: synthetic LiDAR scan with injected phantom points (original figure).</a:t>
+              <a:t>Supplement to L4.1 (about 75 minutes). L4.1 covered the algorithms (FGSM, PGD, physical attacks, adversarial training). This lecture asks what changes when the victim is an autonomous vehicle: temporal state (tracking), a different sensor (LiDAR), multi-sensor fusion, and the closed loop down to steering and braking. Timing guide: recap 8 min, tracking 12, LiDAR 22, fusion 10, closed loop 15, defenses and discussion 8. Title image: synthetic LiDAR scan with injected phantom points (original figure).</a:t>
             </a:r>
           </a:p>
         </p:txBody>
@@ -757,7 +757,7 @@
           <a:lstStyle/>
           <a:p>
             <a:r>
-              <a:t>Explain the three design problems the authors list: which detections to attack, how to survive NMS, and how to reconcile two losses that pull in opposite directions. Connect to L3.2: this is the same optimization view, but the objective now includes pipeline components that are not part of the neural network.</a:t>
+              <a:t>Explain the three design problems the authors list: which detections to attack, how to survive NMS, and how to reconcile two losses that pull in opposite directions. Connect to L4.1: this is the same optimization view, but the objective now includes pipeline components that are not part of the neural network.</a:t>
             </a:r>
           </a:p>
         </p:txBody>
@@ -1527,7 +1527,7 @@
           <a:lstStyle/>
           <a:p>
             <a:r>
-              <a:t>Compare with L3.2: there we maximized the loss over an epsilon-ball around the pixels. Here the variables are the positions of physical points, and the loss has three terms: a segmentation term (misclassify), a semantic term (keep the rest of the scene), and an occlusion term (the points must be visible to the sensor, otherwise the object is not physically useful). The weights alpha = 0.1 and beta = 1 are those reported in the seminar summary of the paper; they are hyperparameters.</a:t>
+              <a:t>Compare with L4.1: there we maximized the loss over an epsilon-ball around the pixels. Here the variables are the positions of physical points, and the loss has three terms: a segmentation term (misclassify), a semantic term (keep the rest of the scene), and an occlusion term (the points must be visible to the sensor, otherwise the object is not physically useful). The weights alpha = 0.1 and beta = 1 are those reported in the seminar summary of the paper; they are hyperparameters.</a:t>
             </a:r>
           </a:p>
         </p:txBody>
@@ -1667,7 +1667,7 @@
           <a:lstStyle/>
           <a:p>
             <a:r>
-              <a:t>Why this matters: cooperative perception moves the trust boundary from the sensor to the V2X link. The same idea returns in L3.4: CP-FREEZER attacks the latency of cooperative perception.</a:t>
+              <a:t>Why this matters: cooperative perception moves the trust boundary from the sensor to the V2X link. The same idea returns in L4.3: CP-FREEZER attacks the latency of cooperative perception.</a:t>
             </a:r>
           </a:p>
         </p:txBody>
@@ -2927,7 +2927,7 @@
           <a:lstStyle/>
           <a:p>
             <a:r>
-              <a:t>Walk left to right. Each arrow is a place where an error can be amplified or filtered. L3.2 attacked the first two boxes with pixels; today we also attack the sensor physics, the tracker, fusion, and the controller. The coloured tags show where the papers in this lecture enter.</a:t>
+              <a:t>Walk left to right. Each arrow is a place where an error can be amplified or filtered. L4.1 attacked the first two boxes with pixels; today we also attack the sensor physics, the tracker, fusion, and the controller. The coloured tags show where the papers in this lecture enter.</a:t>
             </a:r>
           </a:p>
         </p:txBody>
@@ -14218,7 +14218,7 @@
                   <a:srgbClr val="404040"/>
                 </a:solidFill>
               </a:rPr>
-              <a:t>•  L3.2: variables = pixels in an ε-ball.  Here: variables = </a:t>
+              <a:t>•  L4.1: variables = pixels in an ε-ball.  Here: variables = </a:t>
             </a:r>
             <a:r>
               <a:rPr sz="1900" b="1" i="0">
@@ -16852,7 +16852,7 @@
             </a:r>
             <a:r>
               <a:rPr sz="1900" b="0" i="0"/>
-              <a:t>: 3 LiDAR-only and 3 camera-LiDAR fusion architectures</a:t>
+              <a:t> across 3 LiDAR-only and 3 camera-LiDAR fusion architectures</a:t>
             </a:r>
           </a:p>
           <a:p>
@@ -17498,7 +17498,7 @@
           <a:p>
             <a:r>
               <a:rPr sz="4000"/>
-              <a:t>Recap: the L3.2 Toolbox</a:t>
+              <a:t>Recap: the L4.1 Toolbox</a:t>
             </a:r>
           </a:p>
         </p:txBody>
@@ -17585,7 +17585,7 @@
                             <a:srgbClr val="FFFFFF"/>
                           </a:solidFill>
                         </a:rPr>
-                        <a:t>L3.2 concept</a:t>
+                        <a:t>L4.1 concept</a:t>
                       </a:r>
                     </a:p>
                   </a:txBody>
@@ -18025,7 +18025,7 @@
                   <a:srgbClr val="7F7F7F"/>
                 </a:solidFill>
               </a:rPr>
-              <a:t>Recap of L3.2 (Madry et al.; Goodfellow et al.; Evtimov et al.; Nassi et al.).</a:t>
+              <a:t>Recap of L4.1 (Madry et al.; Goodfellow et al.; Evtimov et al.; Nassi et al.).</a:t>
             </a:r>
           </a:p>
         </p:txBody>
@@ -19321,7 +19321,7 @@
                   <a:srgbClr val="D40805"/>
                 </a:solidFill>
               </a:rPr>
-              <a:t>&lt; 0.9 s</a:t>
+              <a:t>≈ 0.9 s</a:t>
             </a:r>
           </a:p>
         </p:txBody>
@@ -24102,7 +24102,7 @@
                   <a:srgbClr val="404040"/>
                 </a:solidFill>
               </a:rPr>
-              <a:t>•  The attacker chooses the weakest layer, not the one we trained adversarially in L3.2</a:t>
+              <a:t>•  The attacker chooses the weakest layer, not the one we trained adversarially in L4.1</a:t>
             </a:r>
           </a:p>
           <a:p>
@@ -24871,7 +24871,7 @@
             </a:pPr>
             <a:r>
               <a:rPr sz="2200" b="1" i="0"/>
-              <a:t>L3.4</a:t>
+              <a:t>L4.3</a:t>
             </a:r>
             <a:r>
               <a:rPr sz="2200" b="0" i="0"/>
@@ -25682,7 +25682,7 @@
                   <a:srgbClr val="7F7F7F"/>
                 </a:solidFill>
               </a:rPr>
-              <a:t>Taxonomy adapted from L3.2 and the surveys cited in the references.</a:t>
+              <a:t>Taxonomy adapted from L4.1 and the surveys cited in the references.</a:t>
             </a:r>
           </a:p>
         </p:txBody>
